--- a/canvas_material/lectures/powerpoint/Session12-ArchitectureWorkshop-inclass.pptx
+++ b/canvas_material/lectures/powerpoint/Session12-ArchitectureWorkshop-inclass.pptx
@@ -1844,7 +1844,7 @@
           <a:p>
             <a:r>
               <a:rPr lang="en-US" dirty="0"/>
-              <a:t>Two minutes to close. Say why the draft is due tomorrow rather than tonight: the boards are the work, this is transcription, and a night in between buys a better document while keeping it off the same evening as the team charter. Then the loop — draft, review, revise — named out loud, because it is the same shape as the proposal, and revision is graded on the Design Document exactly as it was on the Written Proposal. If the room looks daunted by Oct 21, remind them the hard eighty percent is already on their phones.</a:t>
+              <a:t>Two minutes to close. Say why the draft is due Friday rather than tonight: the boards are the work, this is transcription, and a couple of days in between buys a better document while keeping it off the same evening as the team charter. Then the loop — draft, review, revise — named out loud, because it is the same shape as the proposal, and revision is graded on the Design Document exactly as it was on the Written Proposal. If the room looks daunted by Oct 21, remind them the hard eighty percent is already on their phones.</a:t>
             </a:r>
             <a:endParaRPr lang="en-US" dirty="0"/>
           </a:p>
@@ -2108,7 +2108,7 @@
           <a:p>
             <a:r>
               <a:rPr lang="en-US" dirty="0"/>
-              <a:t>One minute. Walk the five rounds and point at the template column — that mapping is the reason the draft is due tomorrow rather than next week. Do not explain the rounds here; each has its own pair of slides. The line at the bottom is the promise worth making explicitly, because students hear whiteboard workshop and assume a second night of writing is coming.</a:t>
+              <a:t>One minute. Walk the five rounds and point at the template column — that mapping is the reason the draft is due Friday rather than next week. Do not explain the rounds here; each has its own pair of slides. The line at the bottom is the promise worth making explicitly, because students hear whiteboard workshop and assume a second night of writing is coming.</a:t>
             </a:r>
             <a:endParaRPr lang="en-US" dirty="0"/>
           </a:p>
@@ -14591,7 +14591,7 @@
                 <a:ea typeface="Calibri" pitchFamily="34" charset="-122"/>
                 <a:cs typeface="Calibri" pitchFamily="34" charset="-120"/>
               </a:rPr>
-              <a:t>A photo of a whiteboard is a legitimate diagram for the draft. The boards are the work — tonight is transcription.</a:t>
+              <a:t>A photo of a whiteboard is a legitimate diagram for the draft. The boards are the work — what follows is transcription.</a:t>
             </a:r>
             <a:endParaRPr lang="en-US" sz="1700" dirty="0"/>
           </a:p>
@@ -14914,7 +14914,7 @@
                 <a:ea typeface="Calibri" pitchFamily="34" charset="-122"/>
                 <a:cs typeface="Calibri" pitchFamily="34" charset="-120"/>
               </a:rPr>
-              <a:t>Design Document draft — end of day tomorrow, Thu, Oct 15
+              <a:t>Design Document draft — end of day Fri, Oct 16
 </a:t>
             </a:r>
             <a:pPr indent="0" marL="0">
@@ -14932,7 +14932,7 @@
                 <a:ea typeface="Calibri" pitchFamily="34" charset="-122"/>
                 <a:cs typeface="Calibri" pitchFamily="34" charset="-120"/>
               </a:rPr>
-              <a:t>Photographed diagrams + skeleton prose + your two argued decisions. That's a complete draft.</a:t>
+              <a:t>Photographed diagrams + skeleton prose + your two argued decisions. Commit it as docs/design.md and upload a copy to Canvas.</a:t>
             </a:r>
             <a:endParaRPr lang="en-US" sz="1650" dirty="0"/>
           </a:p>
@@ -16974,7 +16974,7 @@
                 <a:ea typeface="Cambria" pitchFamily="34" charset="-122"/>
                 <a:cs typeface="Cambria" pitchFamily="34" charset="-120"/>
               </a:rPr>
-              <a:t>Five rounds — and the draft writes itself tonight</a:t>
+              <a:t>Five rounds — and the draft is mostly written here</a:t>
             </a:r>
             <a:endParaRPr lang="en-US" sz="3100" dirty="0"/>
           </a:p>
@@ -17992,7 +17992,7 @@
                 <a:ea typeface="Calibri" pitchFamily="34" charset="-122"/>
                 <a:cs typeface="Calibri" pitchFamily="34" charset="-120"/>
               </a:rPr>
-              <a:t>Each round fills a numbered section of the template, in order. Tonight is transcription, not composition.</a:t>
+              <a:t>Each round fills a numbered section of the template, in order. What follows is transcription, not composition.</a:t>
             </a:r>
             <a:endParaRPr lang="en-US" sz="1550" dirty="0"/>
           </a:p>
